--- a/Docs/Slides/Slide FleetPlus II.pptx
+++ b/Docs/Slides/Slide FleetPlus II.pptx
@@ -4123,7 +4123,7 @@
         <p:spPr>
           <a:xfrm>
             <a:off x="1510506" y="1800230"/>
-            <a:ext cx="7057708" cy="4657090"/>
+            <a:ext cx="7057708" cy="5213985"/>
           </a:xfrm>
           <a:prstGeom prst="rect">
             <a:avLst/>
@@ -4569,6 +4569,34 @@
                 <a:cs typeface="Arial" panose="020B0604020202020204" pitchFamily="34" charset="0"/>
               </a:rPr>
               <a:t>: Docker &amp; Docker Compose</a:t>
+            </a:r>
+            <a:endParaRPr lang="pt-BR" sz="2200" b="1" spc="-10" dirty="0">
+              <a:latin typeface="Arial" panose="020B0604020202020204" pitchFamily="34" charset="0"/>
+              <a:cs typeface="Arial" panose="020B0604020202020204" pitchFamily="34" charset="0"/>
+            </a:endParaRPr>
+          </a:p>
+          <a:p>
+            <a:pPr marL="347980">
+              <a:lnSpc>
+                <a:spcPct val="100000"/>
+              </a:lnSpc>
+              <a:spcBef>
+                <a:spcPts val="1705"/>
+              </a:spcBef>
+            </a:pPr>
+            <a:r>
+              <a:rPr lang="pt-BR" sz="2200" spc="-10" dirty="0">
+                <a:latin typeface="Arial" panose="020B0604020202020204" pitchFamily="34" charset="0"/>
+                <a:cs typeface="Arial" panose="020B0604020202020204" pitchFamily="34" charset="0"/>
+              </a:rPr>
+              <a:t>Hospedagem:</a:t>
+            </a:r>
+            <a:r>
+              <a:rPr lang="pt-BR" sz="2200" b="1" spc="-10" dirty="0">
+                <a:latin typeface="Arial" panose="020B0604020202020204" pitchFamily="34" charset="0"/>
+                <a:cs typeface="Arial" panose="020B0604020202020204" pitchFamily="34" charset="0"/>
+              </a:rPr>
+              <a:t> Netlify</a:t>
             </a:r>
             <a:endParaRPr lang="pt-BR" sz="2200" b="1" spc="-10" dirty="0">
               <a:latin typeface="Arial" panose="020B0604020202020204" pitchFamily="34" charset="0"/>

--- a/Docs/Slides/Slide FleetPlus II.pptx
+++ b/Docs/Slides/Slide FleetPlus II.pptx
@@ -1743,8 +1743,8 @@
         </p:nvSpPr>
         <p:spPr>
           <a:xfrm>
-            <a:off x="3822700" y="4147078"/>
-            <a:ext cx="5638800" cy="1754326"/>
+            <a:off x="3898900" y="4147078"/>
+            <a:ext cx="5638800" cy="1753235"/>
           </a:xfrm>
           <a:prstGeom prst="rect">
             <a:avLst/>
@@ -1760,19 +1760,23 @@
             <a:pPr algn="r"/>
             <a:r>
               <a:rPr lang="pt-BR" b="1" dirty="0"/>
-              <a:t>1529 – Maria Eduarda  Humberto </a:t>
-            </a:r>
-            <a:r>
-              <a:rPr lang="pt-BR" b="1" dirty="0" err="1"/>
-              <a:t>Rask</a:t>
+              <a:t>1694– Hudson Carneiro Bessa</a:t>
             </a:r>
             <a:endParaRPr lang="pt-BR" b="1" dirty="0"/>
           </a:p>
           <a:p>
             <a:pPr algn="r"/>
             <a:r>
-              <a:rPr lang="pt-BR" b="1" dirty="0"/>
-              <a:t>1694– Hudson Carneiro Bessa</a:t>
+              <a:rPr lang="pt-BR" b="1" dirty="0">
+                <a:sym typeface="+mn-ea"/>
+              </a:rPr>
+              <a:t>1529 – Maria Eduarda Humberto </a:t>
+            </a:r>
+            <a:r>
+              <a:rPr lang="pt-BR" b="1" dirty="0" err="1">
+                <a:sym typeface="+mn-ea"/>
+              </a:rPr>
+              <a:t>Rask</a:t>
             </a:r>
             <a:endParaRPr lang="pt-BR" b="1" dirty="0"/>
           </a:p>

--- a/Docs/Slides/Slide FleetPlus II.pptx
+++ b/Docs/Slides/Slide FleetPlus II.pptx
@@ -4859,7 +4859,7 @@
         <p:spPr>
           <a:xfrm>
             <a:off x="1832292" y="2536148"/>
-            <a:ext cx="6415405" cy="1697355"/>
+            <a:ext cx="6415405" cy="2129790"/>
           </a:xfrm>
           <a:prstGeom prst="rect">
             <a:avLst/>
@@ -5114,7 +5114,63 @@
               </a:rPr>
               <a:t>code</a:t>
             </a:r>
-            <a:endParaRPr sz="2200" b="1" dirty="0">
+            <a:endParaRPr sz="2200" b="1" spc="-20" dirty="0">
+              <a:latin typeface="Arial MT"/>
+              <a:cs typeface="Arial MT"/>
+            </a:endParaRPr>
+          </a:p>
+          <a:p>
+            <a:pPr marL="12700" marR="5080" algn="l">
+              <a:lnSpc>
+                <a:spcPts val="3220"/>
+              </a:lnSpc>
+              <a:spcBef>
+                <a:spcPts val="150"/>
+              </a:spcBef>
+            </a:pPr>
+            <a:r>
+              <a:rPr lang="en-US" altLang="pt-BR" sz="2200" dirty="0">
+                <a:latin typeface="Arial MT"/>
+                <a:cs typeface="Arial MT"/>
+              </a:rPr>
+              <a:t>Hospedagem de reposit</a:t>
+            </a:r>
+            <a:r>
+              <a:rPr lang="en-US" altLang="en-US" sz="2200" dirty="0">
+                <a:latin typeface="Arial MT"/>
+                <a:cs typeface="Arial MT"/>
+              </a:rPr>
+              <a:t>ó</a:t>
+            </a:r>
+            <a:r>
+              <a:rPr lang="en-US" altLang="pt-BR" sz="2200" dirty="0">
+                <a:latin typeface="Arial MT"/>
+                <a:cs typeface="Arial MT"/>
+              </a:rPr>
+              <a:t>rios Git</a:t>
+            </a:r>
+            <a:r>
+              <a:rPr lang="pt-BR" altLang="en-US" sz="2200" dirty="0">
+                <a:latin typeface="Arial MT"/>
+                <a:cs typeface="Arial MT"/>
+              </a:rPr>
+              <a:t>:</a:t>
+            </a:r>
+            <a:r>
+              <a:rPr lang="pt-BR" altLang="en-US" sz="2200" b="1" dirty="0">
+                <a:latin typeface="Arial MT"/>
+                <a:cs typeface="Arial MT"/>
+              </a:rPr>
+              <a:t> </a:t>
+            </a:r>
+            <a:r>
+              <a:rPr lang="pt-BR" sz="2200" b="1" dirty="0">
+                <a:latin typeface="Arial MT"/>
+                <a:cs typeface="Arial MT"/>
+              </a:rPr>
+              <a:t>GitHub</a:t>
+            </a:r>
+            <a:endParaRPr lang="pt-BR" sz="2200" b="1" dirty="0">
               <a:latin typeface="Arial MT"/>
               <a:cs typeface="Arial MT"/>
             </a:endParaRPr>

--- a/Docs/Slides/Slide FleetPlus II.pptx
+++ b/Docs/Slides/Slide FleetPlus II.pptx
@@ -1384,7 +1384,21 @@
                 <a:latin typeface="Arial" panose="020B0604020202020204"/>
                 <a:cs typeface="Arial" panose="020B0604020202020204"/>
               </a:rPr>
-              <a:t>2024:</a:t>
+              <a:t>202</a:t>
+            </a:r>
+            <a:r>
+              <a:rPr lang="pt-BR" altLang="" sz="2000" b="1" spc="-10" dirty="0">
+                <a:latin typeface="Arial" panose="020B0604020202020204"/>
+                <a:cs typeface="Arial" panose="020B0604020202020204"/>
+              </a:rPr>
+              <a:t>5</a:t>
+            </a:r>
+            <a:r>
+              <a:rPr sz="2000" b="1" spc="-10" dirty="0">
+                <a:latin typeface="Arial" panose="020B0604020202020204"/>
+                <a:cs typeface="Arial" panose="020B0604020202020204"/>
+              </a:rPr>
+              <a:t>:</a:t>
             </a:r>
             <a:endParaRPr sz="2000" dirty="0">
               <a:latin typeface="Arial" panose="020B0604020202020204"/>
@@ -4127,7 +4141,7 @@
         <p:spPr>
           <a:xfrm>
             <a:off x="1510506" y="1800230"/>
-            <a:ext cx="7057708" cy="5213985"/>
+            <a:ext cx="7057708" cy="4099560"/>
           </a:xfrm>
           <a:prstGeom prst="rect">
             <a:avLst/>
@@ -4574,48 +4588,6 @@
               </a:rPr>
               <a:t>: Docker &amp; Docker Compose</a:t>
             </a:r>
-            <a:endParaRPr lang="pt-BR" sz="2200" b="1" spc="-10" dirty="0">
-              <a:latin typeface="Arial" panose="020B0604020202020204" pitchFamily="34" charset="0"/>
-              <a:cs typeface="Arial" panose="020B0604020202020204" pitchFamily="34" charset="0"/>
-            </a:endParaRPr>
-          </a:p>
-          <a:p>
-            <a:pPr marL="347980">
-              <a:lnSpc>
-                <a:spcPct val="100000"/>
-              </a:lnSpc>
-              <a:spcBef>
-                <a:spcPts val="1705"/>
-              </a:spcBef>
-            </a:pPr>
-            <a:r>
-              <a:rPr lang="pt-BR" sz="2200" spc="-10" dirty="0">
-                <a:latin typeface="Arial" panose="020B0604020202020204" pitchFamily="34" charset="0"/>
-                <a:cs typeface="Arial" panose="020B0604020202020204" pitchFamily="34" charset="0"/>
-              </a:rPr>
-              <a:t>Hospedagem:</a:t>
-            </a:r>
-            <a:r>
-              <a:rPr lang="pt-BR" sz="2200" b="1" spc="-10" dirty="0">
-                <a:latin typeface="Arial" panose="020B0604020202020204" pitchFamily="34" charset="0"/>
-                <a:cs typeface="Arial" panose="020B0604020202020204" pitchFamily="34" charset="0"/>
-              </a:rPr>
-              <a:t> Netlify</a:t>
-            </a:r>
-            <a:endParaRPr lang="pt-BR" sz="2200" b="1" spc="-10" dirty="0">
-              <a:latin typeface="Arial" panose="020B0604020202020204" pitchFamily="34" charset="0"/>
-              <a:cs typeface="Arial" panose="020B0604020202020204" pitchFamily="34" charset="0"/>
-            </a:endParaRPr>
-          </a:p>
-          <a:p>
-            <a:pPr marL="347980">
-              <a:lnSpc>
-                <a:spcPct val="100000"/>
-              </a:lnSpc>
-              <a:spcBef>
-                <a:spcPts val="1705"/>
-              </a:spcBef>
-            </a:pPr>
             <a:endParaRPr lang="pt-BR" sz="2200" b="1" spc="-10" dirty="0">
               <a:latin typeface="Arial" panose="020B0604020202020204" pitchFamily="34" charset="0"/>
               <a:cs typeface="Arial" panose="020B0604020202020204" pitchFamily="34" charset="0"/>
